--- a/lectures/b05/ppt/b05-l04.pptx
+++ b/lectures/b05/ppt/b05-l04.pptx
@@ -11816,7 +11816,7 @@
                 <a:ea typeface="Malgun Gothic"/>
                 <a:cs typeface="Malgun Gothic"/>
               </a:rPr>
-              <a:t>성상세포·미세아교세포 비세포자율 독성(SOD1 변이 성상세포가 정상 운동신경세포를 죽임), 신경염증(B08 L06).</a:t>
+              <a:t>성상세포·미세아교세포 비세포자율 독성(SOD1 변이 성상세포가 정상 운동신경세포를 죽임), 신경염증(B08 L09).</a:t>
             </a:r>
           </a:p>
           <a:p>
